--- a/Presentation/analysis_approach.pptx
+++ b/Presentation/analysis_approach.pptx
@@ -261,7 +261,7 @@
           <a:p>
             <a:fld id="{3DB722E8-D116-4816-A918-F55FD794B53A}" type="datetimeFigureOut">
               <a:rPr lang="fr-FR" smtClean="0"/>
-              <a:t>31/08/2026</a:t>
+              <a:t>04/09/2026</a:t>
             </a:fld>
             <a:endParaRPr lang="fr-FR"/>
           </a:p>
@@ -461,7 +461,7 @@
           <a:p>
             <a:fld id="{3DB722E8-D116-4816-A918-F55FD794B53A}" type="datetimeFigureOut">
               <a:rPr lang="fr-FR" smtClean="0"/>
-              <a:t>31/08/2026</a:t>
+              <a:t>04/09/2026</a:t>
             </a:fld>
             <a:endParaRPr lang="fr-FR"/>
           </a:p>
@@ -671,7 +671,7 @@
           <a:p>
             <a:fld id="{3DB722E8-D116-4816-A918-F55FD794B53A}" type="datetimeFigureOut">
               <a:rPr lang="fr-FR" smtClean="0"/>
-              <a:t>31/08/2026</a:t>
+              <a:t>04/09/2026</a:t>
             </a:fld>
             <a:endParaRPr lang="fr-FR"/>
           </a:p>
@@ -871,7 +871,7 @@
           <a:p>
             <a:fld id="{3DB722E8-D116-4816-A918-F55FD794B53A}" type="datetimeFigureOut">
               <a:rPr lang="fr-FR" smtClean="0"/>
-              <a:t>31/08/2026</a:t>
+              <a:t>04/09/2026</a:t>
             </a:fld>
             <a:endParaRPr lang="fr-FR"/>
           </a:p>
@@ -1147,7 +1147,7 @@
           <a:p>
             <a:fld id="{3DB722E8-D116-4816-A918-F55FD794B53A}" type="datetimeFigureOut">
               <a:rPr lang="fr-FR" smtClean="0"/>
-              <a:t>31/08/2026</a:t>
+              <a:t>04/09/2026</a:t>
             </a:fld>
             <a:endParaRPr lang="fr-FR"/>
           </a:p>
@@ -1415,7 +1415,7 @@
           <a:p>
             <a:fld id="{3DB722E8-D116-4816-A918-F55FD794B53A}" type="datetimeFigureOut">
               <a:rPr lang="fr-FR" smtClean="0"/>
-              <a:t>31/08/2026</a:t>
+              <a:t>04/09/2026</a:t>
             </a:fld>
             <a:endParaRPr lang="fr-FR"/>
           </a:p>
@@ -1830,7 +1830,7 @@
           <a:p>
             <a:fld id="{3DB722E8-D116-4816-A918-F55FD794B53A}" type="datetimeFigureOut">
               <a:rPr lang="fr-FR" smtClean="0"/>
-              <a:t>31/08/2026</a:t>
+              <a:t>04/09/2026</a:t>
             </a:fld>
             <a:endParaRPr lang="fr-FR"/>
           </a:p>
@@ -1972,7 +1972,7 @@
           <a:p>
             <a:fld id="{3DB722E8-D116-4816-A918-F55FD794B53A}" type="datetimeFigureOut">
               <a:rPr lang="fr-FR" smtClean="0"/>
-              <a:t>31/08/2026</a:t>
+              <a:t>04/09/2026</a:t>
             </a:fld>
             <a:endParaRPr lang="fr-FR"/>
           </a:p>
@@ -2085,7 +2085,7 @@
           <a:p>
             <a:fld id="{3DB722E8-D116-4816-A918-F55FD794B53A}" type="datetimeFigureOut">
               <a:rPr lang="fr-FR" smtClean="0"/>
-              <a:t>31/08/2026</a:t>
+              <a:t>04/09/2026</a:t>
             </a:fld>
             <a:endParaRPr lang="fr-FR"/>
           </a:p>
@@ -2398,7 +2398,7 @@
           <a:p>
             <a:fld id="{3DB722E8-D116-4816-A918-F55FD794B53A}" type="datetimeFigureOut">
               <a:rPr lang="fr-FR" smtClean="0"/>
-              <a:t>31/08/2026</a:t>
+              <a:t>04/09/2026</a:t>
             </a:fld>
             <a:endParaRPr lang="fr-FR"/>
           </a:p>
@@ -2687,7 +2687,7 @@
           <a:p>
             <a:fld id="{3DB722E8-D116-4816-A918-F55FD794B53A}" type="datetimeFigureOut">
               <a:rPr lang="fr-FR" smtClean="0"/>
-              <a:t>31/08/2026</a:t>
+              <a:t>04/09/2026</a:t>
             </a:fld>
             <a:endParaRPr lang="fr-FR"/>
           </a:p>
@@ -2930,7 +2930,7 @@
           <a:p>
             <a:fld id="{3DB722E8-D116-4816-A918-F55FD794B53A}" type="datetimeFigureOut">
               <a:rPr lang="fr-FR" smtClean="0"/>
-              <a:t>31/08/2026</a:t>
+              <a:t>04/09/2026</a:t>
             </a:fld>
             <a:endParaRPr lang="fr-FR"/>
           </a:p>
@@ -3361,7 +3361,7 @@
         </p:nvSpPr>
         <p:spPr>
           <a:xfrm>
-            <a:off x="5210400" y="860036"/>
+            <a:off x="4777263" y="330646"/>
             <a:ext cx="1948550" cy="718458"/>
           </a:xfrm>
           <a:prstGeom prst="roundRect">
@@ -3423,10 +3423,10 @@
       </p:sp>
       <p:cxnSp>
         <p:nvCxnSpPr>
-          <p:cNvPr id="6" name="Straight Arrow Connector 5">
-            <a:extLst>
-              <a:ext uri="{FF2B5EF4-FFF2-40B4-BE49-F238E27FC236}">
-                <a16:creationId xmlns:a16="http://schemas.microsoft.com/office/drawing/2014/main" id="{AF0480B4-E33D-AE06-6E34-80B4F2E34BF8}"/>
+          <p:cNvPr id="9" name="Straight Connector 8">
+            <a:extLst>
+              <a:ext uri="{FF2B5EF4-FFF2-40B4-BE49-F238E27FC236}">
+                <a16:creationId xmlns:a16="http://schemas.microsoft.com/office/drawing/2014/main" id="{AFCCDC72-B11E-BD85-A60A-27CD69F7B5AB}"/>
               </a:ext>
             </a:extLst>
           </p:cNvPr>
@@ -3437,48 +3437,7 @@
         </p:nvCxnSpPr>
         <p:spPr>
           <a:xfrm>
-            <a:off x="6883401" y="1050536"/>
-            <a:ext cx="0" cy="337457"/>
-          </a:xfrm>
-          <a:prstGeom prst="straightConnector1">
-            <a:avLst/>
-          </a:prstGeom>
-          <a:ln>
-            <a:tailEnd type="triangle"/>
-          </a:ln>
-        </p:spPr>
-        <p:style>
-          <a:lnRef idx="2">
-            <a:schemeClr val="accent1"/>
-          </a:lnRef>
-          <a:fillRef idx="0">
-            <a:schemeClr val="accent1"/>
-          </a:fillRef>
-          <a:effectRef idx="1">
-            <a:schemeClr val="accent1"/>
-          </a:effectRef>
-          <a:fontRef idx="minor">
-            <a:schemeClr val="tx1"/>
-          </a:fontRef>
-        </p:style>
-      </p:cxnSp>
-      <p:cxnSp>
-        <p:nvCxnSpPr>
-          <p:cNvPr id="9" name="Straight Connector 8">
-            <a:extLst>
-              <a:ext uri="{FF2B5EF4-FFF2-40B4-BE49-F238E27FC236}">
-                <a16:creationId xmlns:a16="http://schemas.microsoft.com/office/drawing/2014/main" id="{AFCCDC72-B11E-BD85-A60A-27CD69F7B5AB}"/>
-              </a:ext>
-            </a:extLst>
-          </p:cNvPr>
-          <p:cNvCxnSpPr>
-            <a:cxnSpLocks/>
-          </p:cNvCxnSpPr>
-          <p:nvPr/>
-        </p:nvCxnSpPr>
-        <p:spPr>
-          <a:xfrm>
-            <a:off x="6184675" y="1582101"/>
+            <a:off x="5751538" y="1052711"/>
             <a:ext cx="0" cy="293914"/>
           </a:xfrm>
           <a:prstGeom prst="line">
@@ -3516,8 +3475,8 @@
         </p:nvCxnSpPr>
         <p:spPr>
           <a:xfrm>
-            <a:off x="2957294" y="3058886"/>
-            <a:ext cx="6541138" cy="0"/>
+            <a:off x="4010530" y="1346626"/>
+            <a:ext cx="3283431" cy="0"/>
           </a:xfrm>
           <a:prstGeom prst="line">
             <a:avLst/>
@@ -3540,10 +3499,10 @@
       </p:cxnSp>
       <p:sp>
         <p:nvSpPr>
-          <p:cNvPr id="16" name="Rectangle: Rounded Corners 15">
-            <a:extLst>
-              <a:ext uri="{FF2B5EF4-FFF2-40B4-BE49-F238E27FC236}">
-                <a16:creationId xmlns:a16="http://schemas.microsoft.com/office/drawing/2014/main" id="{E630C5EB-E08C-7D27-ABB9-4141C26463C7}"/>
+          <p:cNvPr id="26" name="Rectangle: Rounded Corners 25">
+            <a:extLst>
+              <a:ext uri="{FF2B5EF4-FFF2-40B4-BE49-F238E27FC236}">
+                <a16:creationId xmlns:a16="http://schemas.microsoft.com/office/drawing/2014/main" id="{291A775D-0F0C-D2D3-B862-ECCA95CBBDF8}"/>
               </a:ext>
             </a:extLst>
           </p:cNvPr>
@@ -3552,202 +3511,7 @@
         </p:nvSpPr>
         <p:spPr>
           <a:xfrm>
-            <a:off x="4257004" y="1876015"/>
-            <a:ext cx="3830854" cy="718458"/>
-          </a:xfrm>
-          <a:prstGeom prst="roundRect">
-            <a:avLst/>
-          </a:prstGeom>
-          <a:solidFill>
-            <a:schemeClr val="bg2"/>
-          </a:solidFill>
-        </p:spPr>
-        <p:style>
-          <a:lnRef idx="2">
-            <a:schemeClr val="accent1">
-              <a:shade val="15000"/>
-            </a:schemeClr>
-          </a:lnRef>
-          <a:fillRef idx="1">
-            <a:schemeClr val="accent1"/>
-          </a:fillRef>
-          <a:effectRef idx="0">
-            <a:schemeClr val="accent1"/>
-          </a:effectRef>
-          <a:fontRef idx="minor">
-            <a:schemeClr val="lt1"/>
-          </a:fontRef>
-        </p:style>
-        <p:txBody>
-          <a:bodyPr rtlCol="0" anchor="ctr"/>
-          <a:lstStyle/>
-          <a:p>
-            <a:pPr algn="ctr"/>
-            <a:endParaRPr lang="fr-FR" dirty="0">
-              <a:solidFill>
-                <a:schemeClr val="tx1"/>
-              </a:solidFill>
-            </a:endParaRPr>
-          </a:p>
-        </p:txBody>
-      </p:sp>
-      <mc:AlternateContent xmlns:mc="http://schemas.openxmlformats.org/markup-compatibility/2006">
-        <mc:Choice xmlns:a14="http://schemas.microsoft.com/office/drawing/2010/main" Requires="a14">
-          <p:sp>
-            <p:nvSpPr>
-              <p:cNvPr id="17" name="TextBox 16">
-                <a:extLst>
-                  <a:ext uri="{FF2B5EF4-FFF2-40B4-BE49-F238E27FC236}">
-                    <a16:creationId xmlns:a16="http://schemas.microsoft.com/office/drawing/2014/main" id="{722F9DAC-1757-1158-3EA4-47D803F162D8}"/>
-                  </a:ext>
-                </a:extLst>
-              </p:cNvPr>
-              <p:cNvSpPr txBox="1"/>
-              <p:nvPr/>
-            </p:nvSpPr>
-            <p:spPr>
-              <a:xfrm>
-                <a:off x="4353028" y="1960576"/>
-                <a:ext cx="3687356" cy="518604"/>
-              </a:xfrm>
-              <a:prstGeom prst="rect">
-                <a:avLst/>
-              </a:prstGeom>
-              <a:noFill/>
-            </p:spPr>
-            <p:txBody>
-              <a:bodyPr wrap="none" lIns="0" tIns="0" rIns="0" bIns="0" rtlCol="0">
-                <a:spAutoFit/>
-              </a:bodyPr>
-              <a:lstStyle/>
-              <a:p>
-                <a:pPr/>
-                <a14:m>
-                  <m:oMathPara xmlns:m="http://schemas.openxmlformats.org/officeDocument/2006/math">
-                    <m:oMath>
-                      <m:r>
-                        <a:rPr lang="es-AR" b="0" i="1" smtClean="0">
-                          <a:latin typeface="Cambria Math" panose="02040503050406030204" pitchFamily="18" charset="0"/>
-                        </a:rPr>
-                        <m:t>𝑅𝑒𝑣𝑒𝑛𝑢𝑒</m:t>
-                      </m:r>
-                      <m:r>
-                        <a:rPr lang="fr-FR" i="1" smtClean="0">
-                          <a:latin typeface="Cambria Math" panose="02040503050406030204" pitchFamily="18" charset="0"/>
-                        </a:rPr>
-                        <m:t>=</m:t>
-                      </m:r>
-                      <m:r>
-                        <a:rPr lang="es-AR" b="0" i="1" smtClean="0">
-                          <a:latin typeface="Cambria Math" panose="02040503050406030204" pitchFamily="18" charset="0"/>
-                        </a:rPr>
-                        <m:t>𝐶𝑢𝑠𝑡𝑜𝑚𝑒𝑟</m:t>
-                      </m:r>
-                      <m:r>
-                        <a:rPr lang="es-AR" b="0" i="1" smtClean="0">
-                          <a:latin typeface="Cambria Math" panose="02040503050406030204" pitchFamily="18" charset="0"/>
-                        </a:rPr>
-                        <m:t>𝑠</m:t>
-                      </m:r>
-                      <m:r>
-                        <a:rPr lang="es-AR" b="0" i="1" smtClean="0">
-                          <a:latin typeface="Cambria Math" panose="02040503050406030204" pitchFamily="18" charset="0"/>
-                        </a:rPr>
-                        <m:t> ∗ </m:t>
-                      </m:r>
-                      <m:f>
-                        <m:fPr>
-                          <m:ctrlPr>
-                            <a:rPr lang="es-AR" b="0" i="1" smtClean="0">
-                              <a:latin typeface="Cambria Math" panose="02040503050406030204" pitchFamily="18" charset="0"/>
-                            </a:rPr>
-                          </m:ctrlPr>
-                        </m:fPr>
-                        <m:num>
-                          <m:r>
-                            <a:rPr lang="es-AR" b="0" i="1" smtClean="0">
-                              <a:latin typeface="Cambria Math" panose="02040503050406030204" pitchFamily="18" charset="0"/>
-                            </a:rPr>
-                            <m:t>𝑅𝑒𝑣𝑒𝑛𝑢𝑒</m:t>
-                          </m:r>
-                        </m:num>
-                        <m:den>
-                          <m:r>
-                            <a:rPr lang="es-AR" b="0" i="1" smtClean="0">
-                              <a:latin typeface="Cambria Math" panose="02040503050406030204" pitchFamily="18" charset="0"/>
-                            </a:rPr>
-                            <m:t>𝐶𝑢𝑠𝑡𝑜𝑚𝑒𝑟</m:t>
-                          </m:r>
-                        </m:den>
-                      </m:f>
-                    </m:oMath>
-                  </m:oMathPara>
-                </a14:m>
-                <a:endParaRPr lang="fr-FR" dirty="0"/>
-              </a:p>
-            </p:txBody>
-          </p:sp>
-        </mc:Choice>
-        <mc:Fallback>
-          <p:sp>
-            <p:nvSpPr>
-              <p:cNvPr id="17" name="TextBox 16">
-                <a:extLst>
-                  <a:ext uri="{FF2B5EF4-FFF2-40B4-BE49-F238E27FC236}">
-                    <a16:creationId xmlns:a16="http://schemas.microsoft.com/office/drawing/2014/main" id="{722F9DAC-1757-1158-3EA4-47D803F162D8}"/>
-                  </a:ext>
-                </a:extLst>
-              </p:cNvPr>
-              <p:cNvSpPr txBox="1">
-                <a:spLocks noRot="1" noChangeAspect="1" noMove="1" noResize="1" noEditPoints="1" noAdjustHandles="1" noChangeArrowheads="1" noChangeShapeType="1" noTextEdit="1"/>
-              </p:cNvSpPr>
-              <p:nvPr/>
-            </p:nvSpPr>
-            <p:spPr>
-              <a:xfrm>
-                <a:off x="4353028" y="1960576"/>
-                <a:ext cx="3687356" cy="518604"/>
-              </a:xfrm>
-              <a:prstGeom prst="rect">
-                <a:avLst/>
-              </a:prstGeom>
-              <a:blipFill>
-                <a:blip r:embed="rId2"/>
-                <a:stretch>
-                  <a:fillRect/>
-                </a:stretch>
-              </a:blipFill>
-            </p:spPr>
-            <p:txBody>
-              <a:bodyPr/>
-              <a:lstStyle/>
-              <a:p>
-                <a:r>
-                  <a:rPr lang="fr-FR">
-                    <a:noFill/>
-                  </a:rPr>
-                  <a:t> </a:t>
-                </a:r>
-              </a:p>
-            </p:txBody>
-          </p:sp>
-        </mc:Fallback>
-      </mc:AlternateContent>
-      <p:sp>
-        <p:nvSpPr>
-          <p:cNvPr id="26" name="Rectangle: Rounded Corners 25">
-            <a:extLst>
-              <a:ext uri="{FF2B5EF4-FFF2-40B4-BE49-F238E27FC236}">
-                <a16:creationId xmlns:a16="http://schemas.microsoft.com/office/drawing/2014/main" id="{291A775D-0F0C-D2D3-B862-ECCA95CBBDF8}"/>
-              </a:ext>
-            </a:extLst>
-          </p:cNvPr>
-          <p:cNvSpPr/>
-          <p:nvPr/>
-        </p:nvSpPr>
-        <p:spPr>
-          <a:xfrm>
-            <a:off x="2182595" y="4854413"/>
+            <a:off x="3629496" y="3121275"/>
             <a:ext cx="1807029" cy="718458"/>
           </a:xfrm>
           <a:prstGeom prst="roundRect">
@@ -3821,7 +3585,7 @@
         </p:nvSpPr>
         <p:spPr>
           <a:xfrm>
-            <a:off x="2182596" y="5715330"/>
+            <a:off x="3629497" y="3982192"/>
             <a:ext cx="1807029" cy="718458"/>
           </a:xfrm>
           <a:prstGeom prst="roundRect">
@@ -3897,7 +3661,7 @@
         </p:nvCxnSpPr>
         <p:spPr>
           <a:xfrm>
-            <a:off x="1915068" y="4419407"/>
+            <a:off x="3361969" y="2686269"/>
             <a:ext cx="0" cy="1680049"/>
           </a:xfrm>
           <a:prstGeom prst="line">
@@ -3935,7 +3699,7 @@
         </p:nvCxnSpPr>
         <p:spPr>
           <a:xfrm>
-            <a:off x="1923747" y="6099456"/>
+            <a:off x="3370648" y="4366318"/>
             <a:ext cx="258848" cy="0"/>
           </a:xfrm>
           <a:prstGeom prst="line">
@@ -3973,7 +3737,7 @@
         </p:nvCxnSpPr>
         <p:spPr>
           <a:xfrm>
-            <a:off x="1923747" y="5213642"/>
+            <a:off x="3370648" y="3480504"/>
             <a:ext cx="258848" cy="0"/>
           </a:xfrm>
           <a:prstGeom prst="line">
@@ -4009,16 +3773,16 @@
         </p:nvSpPr>
         <p:spPr>
           <a:xfrm>
-            <a:off x="1790758" y="3515432"/>
+            <a:off x="3081681" y="1799505"/>
             <a:ext cx="2354844" cy="897557"/>
           </a:xfrm>
           <a:prstGeom prst="roundRect">
             <a:avLst/>
           </a:prstGeom>
           <a:solidFill>
-            <a:schemeClr val="tx2">
-              <a:lumMod val="25000"/>
-              <a:lumOff val="75000"/>
+            <a:schemeClr val="accent4">
+              <a:lumMod val="20000"/>
+              <a:lumOff val="80000"/>
             </a:schemeClr>
           </a:solidFill>
         </p:spPr>
@@ -4063,136 +3827,22 @@
           </a:p>
         </p:txBody>
       </p:sp>
-      <p:cxnSp>
-        <p:nvCxnSpPr>
-          <p:cNvPr id="37" name="Straight Connector 36">
-            <a:extLst>
-              <a:ext uri="{FF2B5EF4-FFF2-40B4-BE49-F238E27FC236}">
-                <a16:creationId xmlns:a16="http://schemas.microsoft.com/office/drawing/2014/main" id="{58B6B1F5-C3F7-45BE-DE42-212C7475CEB5}"/>
-              </a:ext>
-            </a:extLst>
-          </p:cNvPr>
-          <p:cNvCxnSpPr>
-            <a:cxnSpLocks/>
-          </p:cNvCxnSpPr>
+      <p:sp>
+        <p:nvSpPr>
+          <p:cNvPr id="44" name="Rectangle: Rounded Corners 43">
+            <a:extLst>
+              <a:ext uri="{FF2B5EF4-FFF2-40B4-BE49-F238E27FC236}">
+                <a16:creationId xmlns:a16="http://schemas.microsoft.com/office/drawing/2014/main" id="{36570B40-77AD-7E17-180F-9BE0072AF4E7}"/>
+              </a:ext>
+            </a:extLst>
+          </p:cNvPr>
+          <p:cNvSpPr/>
           <p:nvPr/>
-        </p:nvCxnSpPr>
+        </p:nvSpPr>
         <p:spPr>
           <a:xfrm>
-            <a:off x="4232524" y="5213643"/>
-            <a:ext cx="0" cy="885814"/>
-          </a:xfrm>
-          <a:prstGeom prst="line">
-            <a:avLst/>
-          </a:prstGeom>
-        </p:spPr>
-        <p:style>
-          <a:lnRef idx="2">
-            <a:schemeClr val="accent1"/>
-          </a:lnRef>
-          <a:fillRef idx="0">
-            <a:schemeClr val="accent1"/>
-          </a:fillRef>
-          <a:effectRef idx="1">
-            <a:schemeClr val="accent1"/>
-          </a:effectRef>
-          <a:fontRef idx="minor">
-            <a:schemeClr val="tx1"/>
-          </a:fontRef>
-        </p:style>
-      </p:cxnSp>
-      <p:cxnSp>
-        <p:nvCxnSpPr>
-          <p:cNvPr id="38" name="Straight Connector 37">
-            <a:extLst>
-              <a:ext uri="{FF2B5EF4-FFF2-40B4-BE49-F238E27FC236}">
-                <a16:creationId xmlns:a16="http://schemas.microsoft.com/office/drawing/2014/main" id="{2974A44A-80C5-0259-7A23-183E71B6731F}"/>
-              </a:ext>
-            </a:extLst>
-          </p:cNvPr>
-          <p:cNvCxnSpPr>
-            <a:cxnSpLocks/>
-          </p:cNvCxnSpPr>
-          <p:nvPr/>
-        </p:nvCxnSpPr>
-        <p:spPr>
-          <a:xfrm>
-            <a:off x="3989624" y="6099456"/>
-            <a:ext cx="258848" cy="0"/>
-          </a:xfrm>
-          <a:prstGeom prst="line">
-            <a:avLst/>
-          </a:prstGeom>
-        </p:spPr>
-        <p:style>
-          <a:lnRef idx="2">
-            <a:schemeClr val="accent1"/>
-          </a:lnRef>
-          <a:fillRef idx="0">
-            <a:schemeClr val="accent1"/>
-          </a:fillRef>
-          <a:effectRef idx="1">
-            <a:schemeClr val="accent1"/>
-          </a:effectRef>
-          <a:fontRef idx="minor">
-            <a:schemeClr val="tx1"/>
-          </a:fontRef>
-        </p:style>
-      </p:cxnSp>
-      <p:cxnSp>
-        <p:nvCxnSpPr>
-          <p:cNvPr id="39" name="Straight Connector 38">
-            <a:extLst>
-              <a:ext uri="{FF2B5EF4-FFF2-40B4-BE49-F238E27FC236}">
-                <a16:creationId xmlns:a16="http://schemas.microsoft.com/office/drawing/2014/main" id="{7AEF3AAF-DF77-15E7-CAD1-9BB83EF7BDEE}"/>
-              </a:ext>
-            </a:extLst>
-          </p:cNvPr>
-          <p:cNvCxnSpPr>
-            <a:cxnSpLocks/>
-          </p:cNvCxnSpPr>
-          <p:nvPr/>
-        </p:nvCxnSpPr>
-        <p:spPr>
-          <a:xfrm>
-            <a:off x="3989624" y="5213642"/>
-            <a:ext cx="258848" cy="0"/>
-          </a:xfrm>
-          <a:prstGeom prst="line">
-            <a:avLst/>
-          </a:prstGeom>
-        </p:spPr>
-        <p:style>
-          <a:lnRef idx="2">
-            <a:schemeClr val="accent1"/>
-          </a:lnRef>
-          <a:fillRef idx="0">
-            <a:schemeClr val="accent1"/>
-          </a:fillRef>
-          <a:effectRef idx="1">
-            <a:schemeClr val="accent1"/>
-          </a:effectRef>
-          <a:fontRef idx="minor">
-            <a:schemeClr val="tx1"/>
-          </a:fontRef>
-        </p:style>
-      </p:cxnSp>
-      <p:sp>
-        <p:nvSpPr>
-          <p:cNvPr id="44" name="Rectangle: Rounded Corners 43">
-            <a:extLst>
-              <a:ext uri="{FF2B5EF4-FFF2-40B4-BE49-F238E27FC236}">
-                <a16:creationId xmlns:a16="http://schemas.microsoft.com/office/drawing/2014/main" id="{36570B40-77AD-7E17-180F-9BE0072AF4E7}"/>
-              </a:ext>
-            </a:extLst>
-          </p:cNvPr>
-          <p:cNvSpPr/>
-          <p:nvPr/>
-        </p:nvSpPr>
-        <p:spPr>
-          <a:xfrm>
-            <a:off x="4800599" y="5297320"/>
-            <a:ext cx="1009261" cy="718458"/>
+            <a:off x="7160027" y="4985642"/>
+            <a:ext cx="935960" cy="661687"/>
           </a:xfrm>
           <a:prstGeom prst="roundRect">
             <a:avLst/>
@@ -4257,8 +3907,8 @@
         </p:nvSpPr>
         <p:spPr>
           <a:xfrm>
-            <a:off x="8452325" y="4986267"/>
-            <a:ext cx="1969198" cy="718456"/>
+            <a:off x="9184619" y="4975552"/>
+            <a:ext cx="1826178" cy="661685"/>
           </a:xfrm>
           <a:prstGeom prst="roundRect">
             <a:avLst/>
@@ -4299,8 +3949,8 @@
           </a:p>
         </p:txBody>
       </p:sp>
-      <mc:AlternateContent xmlns:mc="http://schemas.openxmlformats.org/markup-compatibility/2006" xmlns:a14="http://schemas.microsoft.com/office/drawing/2010/main">
-        <mc:Choice Requires="a14">
+      <mc:AlternateContent xmlns:mc="http://schemas.openxmlformats.org/markup-compatibility/2006">
+        <mc:Choice xmlns:a14="http://schemas.microsoft.com/office/drawing/2010/main" Requires="a14">
           <p:sp>
             <p:nvSpPr>
               <p:cNvPr id="55" name="TextBox 54">
@@ -4315,8 +3965,8 @@
             </p:nvSpPr>
             <p:spPr>
               <a:xfrm>
-                <a:off x="8756875" y="5111847"/>
-                <a:ext cx="1252530" cy="461024"/>
+                <a:off x="9437117" y="5080790"/>
+                <a:ext cx="1161561" cy="461024"/>
               </a:xfrm>
               <a:prstGeom prst="rect">
                 <a:avLst/>
@@ -4378,7 +4028,7 @@
             </p:txBody>
           </p:sp>
         </mc:Choice>
-        <mc:Fallback xmlns="">
+        <mc:Fallback>
           <p:sp>
             <p:nvSpPr>
               <p:cNvPr id="55" name="TextBox 54">
@@ -4395,14 +4045,14 @@
             </p:nvSpPr>
             <p:spPr>
               <a:xfrm>
-                <a:off x="8756875" y="5111847"/>
-                <a:ext cx="1252530" cy="461024"/>
+                <a:off x="9437117" y="5080790"/>
+                <a:ext cx="1161561" cy="461024"/>
               </a:xfrm>
               <a:prstGeom prst="rect">
                 <a:avLst/>
               </a:prstGeom>
               <a:blipFill>
-                <a:blip r:embed="rId3"/>
+                <a:blip r:embed="rId2"/>
                 <a:stretch>
                   <a:fillRect/>
                 </a:stretch>
@@ -4437,16 +4087,16 @@
         </p:nvSpPr>
         <p:spPr>
           <a:xfrm>
-            <a:off x="8210187" y="3522544"/>
+            <a:off x="5826628" y="1791768"/>
             <a:ext cx="2354844" cy="897557"/>
           </a:xfrm>
           <a:prstGeom prst="roundRect">
             <a:avLst/>
           </a:prstGeom>
           <a:solidFill>
-            <a:schemeClr val="tx2">
-              <a:lumMod val="25000"/>
-              <a:lumOff val="75000"/>
+            <a:schemeClr val="accent4">
+              <a:lumMod val="20000"/>
+              <a:lumOff val="80000"/>
             </a:schemeClr>
           </a:solidFill>
         </p:spPr>
@@ -4481,8 +4131,8 @@
           </a:p>
         </p:txBody>
       </p:sp>
-      <mc:AlternateContent xmlns:mc="http://schemas.openxmlformats.org/markup-compatibility/2006" xmlns:a14="http://schemas.microsoft.com/office/drawing/2010/main">
-        <mc:Choice Requires="a14">
+      <mc:AlternateContent xmlns:mc="http://schemas.openxmlformats.org/markup-compatibility/2006">
+        <mc:Choice xmlns:a14="http://schemas.microsoft.com/office/drawing/2010/main" Requires="a14">
           <p:sp>
             <p:nvSpPr>
               <p:cNvPr id="24" name="TextBox 23">
@@ -4497,7 +4147,7 @@
             </p:nvSpPr>
             <p:spPr>
               <a:xfrm>
-                <a:off x="8761344" y="3712020"/>
+                <a:off x="6377785" y="1981244"/>
                 <a:ext cx="1252530" cy="518604"/>
               </a:xfrm>
               <a:prstGeom prst="rect">
@@ -4560,7 +4210,7 @@
             </p:txBody>
           </p:sp>
         </mc:Choice>
-        <mc:Fallback xmlns="">
+        <mc:Fallback>
           <p:sp>
             <p:nvSpPr>
               <p:cNvPr id="24" name="TextBox 23">
@@ -4577,14 +4227,14 @@
             </p:nvSpPr>
             <p:spPr>
               <a:xfrm>
-                <a:off x="8761344" y="3712020"/>
+                <a:off x="6377785" y="1981244"/>
                 <a:ext cx="1252530" cy="518604"/>
               </a:xfrm>
               <a:prstGeom prst="rect">
                 <a:avLst/>
               </a:prstGeom>
               <a:blipFill>
-                <a:blip r:embed="rId4"/>
+                <a:blip r:embed="rId3"/>
                 <a:stretch>
                   <a:fillRect/>
                 </a:stretch>
@@ -4616,13 +4266,12 @@
           </p:cNvPr>
           <p:cNvCxnSpPr>
             <a:cxnSpLocks/>
-            <a:endCxn id="36" idx="0"/>
           </p:cNvCxnSpPr>
           <p:nvPr/>
         </p:nvCxnSpPr>
         <p:spPr>
           <a:xfrm>
-            <a:off x="2968180" y="3058886"/>
+            <a:off x="4016951" y="1353738"/>
             <a:ext cx="0" cy="456546"/>
           </a:xfrm>
           <a:prstGeom prst="straightConnector1">
@@ -4663,7 +4312,7 @@
         </p:nvCxnSpPr>
         <p:spPr>
           <a:xfrm flipH="1">
-            <a:off x="9508448" y="3058886"/>
+            <a:off x="7293961" y="1346626"/>
             <a:ext cx="870" cy="463658"/>
           </a:xfrm>
           <a:prstGeom prst="straightConnector1">
@@ -4688,25 +4337,98 @@
           </a:fontRef>
         </p:style>
       </p:cxnSp>
+      <p:sp>
+        <p:nvSpPr>
+          <p:cNvPr id="45" name="Rectangle: Rounded Corners 44">
+            <a:extLst>
+              <a:ext uri="{FF2B5EF4-FFF2-40B4-BE49-F238E27FC236}">
+                <a16:creationId xmlns:a16="http://schemas.microsoft.com/office/drawing/2014/main" id="{ED2E37B3-DBD8-BB0C-0906-78B2993A7EAF}"/>
+              </a:ext>
+            </a:extLst>
+          </p:cNvPr>
+          <p:cNvSpPr/>
+          <p:nvPr/>
+        </p:nvSpPr>
+        <p:spPr>
+          <a:xfrm>
+            <a:off x="7984295" y="3679338"/>
+            <a:ext cx="1807030" cy="661687"/>
+          </a:xfrm>
+          <a:prstGeom prst="roundRect">
+            <a:avLst/>
+          </a:prstGeom>
+          <a:solidFill>
+            <a:schemeClr val="tx2">
+              <a:lumMod val="25000"/>
+              <a:lumOff val="75000"/>
+            </a:schemeClr>
+          </a:solidFill>
+        </p:spPr>
+        <p:style>
+          <a:lnRef idx="2">
+            <a:schemeClr val="accent1">
+              <a:shade val="15000"/>
+            </a:schemeClr>
+          </a:lnRef>
+          <a:fillRef idx="1">
+            <a:schemeClr val="accent1"/>
+          </a:fillRef>
+          <a:effectRef idx="0">
+            <a:schemeClr val="accent1"/>
+          </a:effectRef>
+          <a:fontRef idx="minor">
+            <a:schemeClr val="lt1"/>
+          </a:fontRef>
+        </p:style>
+        <p:txBody>
+          <a:bodyPr rtlCol="0" anchor="ctr"/>
+          <a:lstStyle/>
+          <a:p>
+            <a:pPr algn="ctr"/>
+            <a:r>
+              <a:rPr lang="es-AR" dirty="0">
+                <a:solidFill>
+                  <a:schemeClr val="tx1"/>
+                </a:solidFill>
+                <a:latin typeface="Cambria Math" panose="02040503050406030204" pitchFamily="18" charset="0"/>
+                <a:ea typeface="Cambria Math" panose="02040503050406030204" pitchFamily="18" charset="0"/>
+              </a:rPr>
+              <a:t>Revenue</a:t>
+            </a:r>
+            <a:r>
+              <a:rPr lang="es-AR" dirty="0">
+                <a:solidFill>
+                  <a:schemeClr val="tx1"/>
+                </a:solidFill>
+              </a:rPr>
+              <a:t> </a:t>
+            </a:r>
+            <a:endParaRPr lang="fr-FR" dirty="0">
+              <a:solidFill>
+                <a:schemeClr val="tx1"/>
+              </a:solidFill>
+            </a:endParaRPr>
+          </a:p>
+        </p:txBody>
+      </p:sp>
       <p:cxnSp>
         <p:nvCxnSpPr>
-          <p:cNvPr id="67" name="Straight Arrow Connector 66">
-            <a:extLst>
-              <a:ext uri="{FF2B5EF4-FFF2-40B4-BE49-F238E27FC236}">
-                <a16:creationId xmlns:a16="http://schemas.microsoft.com/office/drawing/2014/main" id="{B4436A13-6855-B869-1A81-BD096EB3BA75}"/>
+          <p:cNvPr id="6" name="Straight Arrow Connector 5">
+            <a:extLst>
+              <a:ext uri="{FF2B5EF4-FFF2-40B4-BE49-F238E27FC236}">
+                <a16:creationId xmlns:a16="http://schemas.microsoft.com/office/drawing/2014/main" id="{AF0480B4-E33D-AE06-6E34-80B4F2E34BF8}"/>
               </a:ext>
             </a:extLst>
           </p:cNvPr>
           <p:cNvCxnSpPr>
             <a:cxnSpLocks/>
-            <a:endCxn id="44" idx="1"/>
           </p:cNvCxnSpPr>
           <p:nvPr/>
         </p:nvCxnSpPr>
         <p:spPr>
           <a:xfrm>
-            <a:off x="4248472" y="5656548"/>
-            <a:ext cx="552127" cy="1"/>
+            <a:off x="9517747" y="3839733"/>
+            <a:ext cx="0" cy="310792"/>
           </a:xfrm>
           <a:prstGeom prst="straightConnector1">
             <a:avLst/>
@@ -4732,10 +4454,10 @@
       </p:cxnSp>
       <p:cxnSp>
         <p:nvCxnSpPr>
-          <p:cNvPr id="71" name="Straight Arrow Connector 70">
-            <a:extLst>
-              <a:ext uri="{FF2B5EF4-FFF2-40B4-BE49-F238E27FC236}">
-                <a16:creationId xmlns:a16="http://schemas.microsoft.com/office/drawing/2014/main" id="{D1717D59-65C5-0FA3-B6FA-AE54DF50A4C9}"/>
+          <p:cNvPr id="48" name="Straight Connector 47">
+            <a:extLst>
+              <a:ext uri="{FF2B5EF4-FFF2-40B4-BE49-F238E27FC236}">
+                <a16:creationId xmlns:a16="http://schemas.microsoft.com/office/drawing/2014/main" id="{E29DF7F1-C0FB-FBA8-FDBA-76FBE7B0B7A1}"/>
               </a:ext>
             </a:extLst>
           </p:cNvPr>
@@ -4746,8 +4468,84 @@
         </p:nvCxnSpPr>
         <p:spPr>
           <a:xfrm>
-            <a:off x="9519113" y="4432023"/>
-            <a:ext cx="0" cy="554244"/>
+            <a:off x="8855918" y="4364250"/>
+            <a:ext cx="0" cy="270690"/>
+          </a:xfrm>
+          <a:prstGeom prst="line">
+            <a:avLst/>
+          </a:prstGeom>
+        </p:spPr>
+        <p:style>
+          <a:lnRef idx="2">
+            <a:schemeClr val="accent1"/>
+          </a:lnRef>
+          <a:fillRef idx="0">
+            <a:schemeClr val="accent1"/>
+          </a:fillRef>
+          <a:effectRef idx="1">
+            <a:schemeClr val="accent1"/>
+          </a:effectRef>
+          <a:fontRef idx="minor">
+            <a:schemeClr val="tx1"/>
+          </a:fontRef>
+        </p:style>
+      </p:cxnSp>
+      <p:cxnSp>
+        <p:nvCxnSpPr>
+          <p:cNvPr id="49" name="Straight Connector 48">
+            <a:extLst>
+              <a:ext uri="{FF2B5EF4-FFF2-40B4-BE49-F238E27FC236}">
+                <a16:creationId xmlns:a16="http://schemas.microsoft.com/office/drawing/2014/main" id="{680A71E8-55A0-27B3-8297-132D2667306F}"/>
+              </a:ext>
+            </a:extLst>
+          </p:cNvPr>
+          <p:cNvCxnSpPr>
+            <a:cxnSpLocks/>
+          </p:cNvCxnSpPr>
+          <p:nvPr/>
+        </p:nvCxnSpPr>
+        <p:spPr>
+          <a:xfrm>
+            <a:off x="7766124" y="4622799"/>
+            <a:ext cx="2231549" cy="0"/>
+          </a:xfrm>
+          <a:prstGeom prst="line">
+            <a:avLst/>
+          </a:prstGeom>
+        </p:spPr>
+        <p:style>
+          <a:lnRef idx="2">
+            <a:schemeClr val="accent1"/>
+          </a:lnRef>
+          <a:fillRef idx="0">
+            <a:schemeClr val="accent1"/>
+          </a:fillRef>
+          <a:effectRef idx="1">
+            <a:schemeClr val="accent1"/>
+          </a:effectRef>
+          <a:fontRef idx="minor">
+            <a:schemeClr val="tx1"/>
+          </a:fontRef>
+        </p:style>
+      </p:cxnSp>
+      <p:cxnSp>
+        <p:nvCxnSpPr>
+          <p:cNvPr id="57" name="Straight Arrow Connector 56">
+            <a:extLst>
+              <a:ext uri="{FF2B5EF4-FFF2-40B4-BE49-F238E27FC236}">
+                <a16:creationId xmlns:a16="http://schemas.microsoft.com/office/drawing/2014/main" id="{CDF1B9D2-57E7-32DB-CB3E-7FAADFBEE0BD}"/>
+              </a:ext>
+            </a:extLst>
+          </p:cNvPr>
+          <p:cNvCxnSpPr>
+            <a:cxnSpLocks/>
+          </p:cNvCxnSpPr>
+          <p:nvPr/>
+        </p:nvCxnSpPr>
+        <p:spPr>
+          <a:xfrm>
+            <a:off x="9997672" y="4630197"/>
+            <a:ext cx="1" cy="337958"/>
           </a:xfrm>
           <a:prstGeom prst="straightConnector1">
             <a:avLst/>
@@ -4773,10 +4571,10 @@
       </p:cxnSp>
       <p:cxnSp>
         <p:nvCxnSpPr>
-          <p:cNvPr id="79" name="Straight Arrow Connector 78">
-            <a:extLst>
-              <a:ext uri="{FF2B5EF4-FFF2-40B4-BE49-F238E27FC236}">
-                <a16:creationId xmlns:a16="http://schemas.microsoft.com/office/drawing/2014/main" id="{E2B809D9-B96C-7869-410B-C3773B64512A}"/>
+          <p:cNvPr id="58" name="Straight Arrow Connector 57">
+            <a:extLst>
+              <a:ext uri="{FF2B5EF4-FFF2-40B4-BE49-F238E27FC236}">
+                <a16:creationId xmlns:a16="http://schemas.microsoft.com/office/drawing/2014/main" id="{E962A874-4664-0CAA-BF3C-ED709934D512}"/>
               </a:ext>
             </a:extLst>
           </p:cNvPr>
@@ -4787,10 +4585,92 @@
         </p:nvCxnSpPr>
         <p:spPr>
           <a:xfrm>
-            <a:off x="6199190" y="2601686"/>
-            <a:ext cx="0" cy="457200"/>
+            <a:off x="6448660" y="607773"/>
+            <a:ext cx="0" cy="337457"/>
           </a:xfrm>
           <a:prstGeom prst="straightConnector1">
+            <a:avLst/>
+          </a:prstGeom>
+          <a:ln>
+            <a:tailEnd type="triangle"/>
+          </a:ln>
+        </p:spPr>
+        <p:style>
+          <a:lnRef idx="2">
+            <a:schemeClr val="accent1"/>
+          </a:lnRef>
+          <a:fillRef idx="0">
+            <a:schemeClr val="accent1"/>
+          </a:fillRef>
+          <a:effectRef idx="1">
+            <a:schemeClr val="accent1"/>
+          </a:effectRef>
+          <a:fontRef idx="minor">
+            <a:schemeClr val="tx1"/>
+          </a:fontRef>
+        </p:style>
+      </p:cxnSp>
+      <p:cxnSp>
+        <p:nvCxnSpPr>
+          <p:cNvPr id="66" name="Straight Arrow Connector 65">
+            <a:extLst>
+              <a:ext uri="{FF2B5EF4-FFF2-40B4-BE49-F238E27FC236}">
+                <a16:creationId xmlns:a16="http://schemas.microsoft.com/office/drawing/2014/main" id="{F3CDCF25-75EB-61EC-8FFA-EE62A1F9BFF0}"/>
+              </a:ext>
+            </a:extLst>
+          </p:cNvPr>
+          <p:cNvCxnSpPr>
+            <a:cxnSpLocks/>
+          </p:cNvCxnSpPr>
+          <p:nvPr/>
+        </p:nvCxnSpPr>
+        <p:spPr>
+          <a:xfrm>
+            <a:off x="7766124" y="4630197"/>
+            <a:ext cx="1" cy="337958"/>
+          </a:xfrm>
+          <a:prstGeom prst="straightConnector1">
+            <a:avLst/>
+          </a:prstGeom>
+          <a:ln>
+            <a:tailEnd type="triangle"/>
+          </a:ln>
+        </p:spPr>
+        <p:style>
+          <a:lnRef idx="2">
+            <a:schemeClr val="accent1"/>
+          </a:lnRef>
+          <a:fillRef idx="0">
+            <a:schemeClr val="accent1"/>
+          </a:fillRef>
+          <a:effectRef idx="1">
+            <a:schemeClr val="accent1"/>
+          </a:effectRef>
+          <a:fontRef idx="minor">
+            <a:schemeClr val="tx1"/>
+          </a:fontRef>
+        </p:style>
+      </p:cxnSp>
+      <p:cxnSp>
+        <p:nvCxnSpPr>
+          <p:cNvPr id="69" name="Connector: Curved 68">
+            <a:extLst>
+              <a:ext uri="{FF2B5EF4-FFF2-40B4-BE49-F238E27FC236}">
+                <a16:creationId xmlns:a16="http://schemas.microsoft.com/office/drawing/2014/main" id="{FE95C362-22C5-8971-6BE1-6D20BE7C60B4}"/>
+              </a:ext>
+            </a:extLst>
+          </p:cNvPr>
+          <p:cNvCxnSpPr>
+            <a:cxnSpLocks/>
+          </p:cNvCxnSpPr>
+          <p:nvPr/>
+        </p:nvCxnSpPr>
+        <p:spPr>
+          <a:xfrm>
+            <a:off x="6725813" y="668527"/>
+            <a:ext cx="2791934" cy="3002067"/>
+          </a:xfrm>
+          <a:prstGeom prst="curvedConnector2">
             <a:avLst/>
           </a:prstGeom>
           <a:ln>
